--- a/knf/decks/d4p6.pptx
+++ b/knf/decks/d4p6.pptx
@@ -7305,7 +7305,7 @@
                 <a:ea typeface="Pretendard"/>
                 <a:cs typeface="Pretendard"/>
               </a:rPr>
-              <a:t>45분 뒤에는</a:t>
+              <a:t>50분 뒤에는</a:t>
             </a:r>
           </a:p>
         </p:txBody>

--- a/knf/decks/d4p6.pptx
+++ b/knf/decks/d4p6.pptx
@@ -3101,7 +3101,7 @@
       <p:grpSpPr/>
       <p:sp>
         <p:nvSpPr>
-          <p:cNvPr id="2" name="Oval 1"/>
+          <p:cNvPr id="2" name="deckgen:decor"/>
           <p:cNvSpPr/>
           <p:nvPr/>
         </p:nvSpPr>
@@ -3131,7 +3131,7 @@
       </p:sp>
       <p:sp>
         <p:nvSpPr>
-          <p:cNvPr id="3" name="Oval 2"/>
+          <p:cNvPr id="3" name="deckgen:decor"/>
           <p:cNvSpPr/>
           <p:nvPr/>
         </p:nvSpPr>
@@ -3161,7 +3161,7 @@
       </p:sp>
       <p:sp>
         <p:nvSpPr>
-          <p:cNvPr id="4" name="Oval 3"/>
+          <p:cNvPr id="4" name="deckgen:decor"/>
           <p:cNvSpPr/>
           <p:nvPr/>
         </p:nvSpPr>
@@ -3191,7 +3191,7 @@
       </p:sp>
       <p:sp>
         <p:nvSpPr>
-          <p:cNvPr id="5" name="Rectangle 4"/>
+          <p:cNvPr id="5" name="deckgen:decor"/>
           <p:cNvSpPr/>
           <p:nvPr/>
         </p:nvSpPr>
@@ -3221,7 +3221,7 @@
       </p:sp>
       <p:sp>
         <p:nvSpPr>
-          <p:cNvPr id="6" name="Oval 5"/>
+          <p:cNvPr id="6" name="deckgen:decor"/>
           <p:cNvSpPr/>
           <p:nvPr/>
         </p:nvSpPr>
@@ -3251,7 +3251,7 @@
       </p:sp>
       <p:sp>
         <p:nvSpPr>
-          <p:cNvPr id="7" name="Oval 6"/>
+          <p:cNvPr id="7" name="deckgen:decor"/>
           <p:cNvSpPr/>
           <p:nvPr/>
         </p:nvSpPr>
@@ -3281,7 +3281,7 @@
       </p:sp>
       <p:sp>
         <p:nvSpPr>
-          <p:cNvPr id="8" name="Oval 7"/>
+          <p:cNvPr id="8" name="deckgen:decor"/>
           <p:cNvSpPr/>
           <p:nvPr/>
         </p:nvSpPr>
@@ -3311,7 +3311,7 @@
       </p:sp>
       <p:sp>
         <p:nvSpPr>
-          <p:cNvPr id="9" name="Oval 8"/>
+          <p:cNvPr id="9" name="deckgen:decor"/>
           <p:cNvSpPr/>
           <p:nvPr/>
         </p:nvSpPr>
@@ -3341,7 +3341,7 @@
       </p:sp>
       <p:sp>
         <p:nvSpPr>
-          <p:cNvPr id="10" name="Rectangle 9"/>
+          <p:cNvPr id="10" name="deckgen:decor"/>
           <p:cNvSpPr/>
           <p:nvPr/>
         </p:nvSpPr>
@@ -3601,7 +3601,7 @@
       <p:grpSpPr/>
       <p:sp>
         <p:nvSpPr>
-          <p:cNvPr id="2" name="Oval 1"/>
+          <p:cNvPr id="2" name="deckgen:decor"/>
           <p:cNvSpPr/>
           <p:nvPr/>
         </p:nvSpPr>
@@ -3631,7 +3631,7 @@
       </p:sp>
       <p:sp>
         <p:nvSpPr>
-          <p:cNvPr id="3" name="Oval 2"/>
+          <p:cNvPr id="3" name="deckgen:decor"/>
           <p:cNvSpPr/>
           <p:nvPr/>
         </p:nvSpPr>
@@ -3661,7 +3661,7 @@
       </p:sp>
       <p:sp>
         <p:nvSpPr>
-          <p:cNvPr id="4" name="Oval 3"/>
+          <p:cNvPr id="4" name="deckgen:decor"/>
           <p:cNvSpPr/>
           <p:nvPr/>
         </p:nvSpPr>
@@ -5271,7 +5271,7 @@
       <p:grpSpPr/>
       <p:sp>
         <p:nvSpPr>
-          <p:cNvPr id="2" name="Oval 1"/>
+          <p:cNvPr id="2" name="deckgen:decor"/>
           <p:cNvSpPr/>
           <p:nvPr/>
         </p:nvSpPr>
@@ -5301,7 +5301,7 @@
       </p:sp>
       <p:sp>
         <p:nvSpPr>
-          <p:cNvPr id="3" name="Oval 2"/>
+          <p:cNvPr id="3" name="deckgen:decor"/>
           <p:cNvSpPr/>
           <p:nvPr/>
         </p:nvSpPr>
@@ -5331,7 +5331,7 @@
       </p:sp>
       <p:sp>
         <p:nvSpPr>
-          <p:cNvPr id="4" name="Oval 3"/>
+          <p:cNvPr id="4" name="deckgen:decor"/>
           <p:cNvSpPr/>
           <p:nvPr/>
         </p:nvSpPr>
@@ -6333,7 +6333,7 @@
       <p:grpSpPr/>
       <p:sp>
         <p:nvSpPr>
-          <p:cNvPr id="2" name="Oval 1"/>
+          <p:cNvPr id="2" name="deckgen:decor"/>
           <p:cNvSpPr/>
           <p:nvPr/>
         </p:nvSpPr>
@@ -6363,7 +6363,7 @@
       </p:sp>
       <p:sp>
         <p:nvSpPr>
-          <p:cNvPr id="3" name="Oval 2"/>
+          <p:cNvPr id="3" name="deckgen:decor"/>
           <p:cNvSpPr/>
           <p:nvPr/>
         </p:nvSpPr>
@@ -7140,7 +7140,7 @@
       <p:grpSpPr/>
       <p:sp>
         <p:nvSpPr>
-          <p:cNvPr id="2" name="Oval 1"/>
+          <p:cNvPr id="2" name="deckgen:decor"/>
           <p:cNvSpPr/>
           <p:nvPr/>
         </p:nvSpPr>
@@ -7170,7 +7170,7 @@
       </p:sp>
       <p:sp>
         <p:nvSpPr>
-          <p:cNvPr id="3" name="Oval 2"/>
+          <p:cNvPr id="3" name="deckgen:decor"/>
           <p:cNvSpPr/>
           <p:nvPr/>
         </p:nvSpPr>
@@ -7200,7 +7200,7 @@
       </p:sp>
       <p:sp>
         <p:nvSpPr>
-          <p:cNvPr id="4" name="Oval 3"/>
+          <p:cNvPr id="4" name="deckgen:decor"/>
           <p:cNvSpPr/>
           <p:nvPr/>
         </p:nvSpPr>
@@ -7985,7 +7985,7 @@
       <p:grpSpPr/>
       <p:sp>
         <p:nvSpPr>
-          <p:cNvPr id="2" name="Oval 1"/>
+          <p:cNvPr id="2" name="deckgen:decor"/>
           <p:cNvSpPr/>
           <p:nvPr/>
         </p:nvSpPr>
@@ -8015,7 +8015,7 @@
       </p:sp>
       <p:sp>
         <p:nvSpPr>
-          <p:cNvPr id="3" name="Oval 2"/>
+          <p:cNvPr id="3" name="deckgen:decor"/>
           <p:cNvSpPr/>
           <p:nvPr/>
         </p:nvSpPr>
@@ -8045,7 +8045,7 @@
       </p:sp>
       <p:sp>
         <p:nvSpPr>
-          <p:cNvPr id="4" name="Oval 3"/>
+          <p:cNvPr id="4" name="deckgen:decor"/>
           <p:cNvSpPr/>
           <p:nvPr/>
         </p:nvSpPr>
@@ -9880,7 +9880,7 @@
       <p:grpSpPr/>
       <p:sp>
         <p:nvSpPr>
-          <p:cNvPr id="2" name="Oval 1"/>
+          <p:cNvPr id="2" name="deckgen:decor"/>
           <p:cNvSpPr/>
           <p:nvPr/>
         </p:nvSpPr>
@@ -9910,7 +9910,7 @@
       </p:sp>
       <p:sp>
         <p:nvSpPr>
-          <p:cNvPr id="3" name="Oval 2"/>
+          <p:cNvPr id="3" name="deckgen:decor"/>
           <p:cNvSpPr/>
           <p:nvPr/>
         </p:nvSpPr>
@@ -9940,7 +9940,7 @@
       </p:sp>
       <p:sp>
         <p:nvSpPr>
-          <p:cNvPr id="4" name="Oval 3"/>
+          <p:cNvPr id="4" name="deckgen:decor"/>
           <p:cNvSpPr/>
           <p:nvPr/>
         </p:nvSpPr>
@@ -10941,7 +10941,7 @@
       <p:grpSpPr/>
       <p:sp>
         <p:nvSpPr>
-          <p:cNvPr id="2" name="Oval 1"/>
+          <p:cNvPr id="2" name="deckgen:decor"/>
           <p:cNvSpPr/>
           <p:nvPr/>
         </p:nvSpPr>
@@ -10971,7 +10971,7 @@
       </p:sp>
       <p:sp>
         <p:nvSpPr>
-          <p:cNvPr id="3" name="Oval 2"/>
+          <p:cNvPr id="3" name="deckgen:decor"/>
           <p:cNvSpPr/>
           <p:nvPr/>
         </p:nvSpPr>
@@ -11001,7 +11001,7 @@
       </p:sp>
       <p:sp>
         <p:nvSpPr>
-          <p:cNvPr id="4" name="Oval 3"/>
+          <p:cNvPr id="4" name="deckgen:decor"/>
           <p:cNvSpPr/>
           <p:nvPr/>
         </p:nvSpPr>
@@ -12315,7 +12315,7 @@
       <p:grpSpPr/>
       <p:sp>
         <p:nvSpPr>
-          <p:cNvPr id="2" name="Oval 1"/>
+          <p:cNvPr id="2" name="deckgen:decor"/>
           <p:cNvSpPr/>
           <p:nvPr/>
         </p:nvSpPr>
@@ -12345,7 +12345,7 @@
       </p:sp>
       <p:sp>
         <p:nvSpPr>
-          <p:cNvPr id="3" name="Oval 2"/>
+          <p:cNvPr id="3" name="deckgen:decor"/>
           <p:cNvSpPr/>
           <p:nvPr/>
         </p:nvSpPr>
@@ -12375,7 +12375,7 @@
       </p:sp>
       <p:sp>
         <p:nvSpPr>
-          <p:cNvPr id="4" name="Oval 3"/>
+          <p:cNvPr id="4" name="deckgen:decor"/>
           <p:cNvSpPr/>
           <p:nvPr/>
         </p:nvSpPr>
@@ -13508,7 +13508,7 @@
       <p:grpSpPr/>
       <p:sp>
         <p:nvSpPr>
-          <p:cNvPr id="2" name="Oval 1"/>
+          <p:cNvPr id="2" name="deckgen:decor"/>
           <p:cNvSpPr/>
           <p:nvPr/>
         </p:nvSpPr>
@@ -13538,7 +13538,7 @@
       </p:sp>
       <p:sp>
         <p:nvSpPr>
-          <p:cNvPr id="3" name="Oval 2"/>
+          <p:cNvPr id="3" name="deckgen:decor"/>
           <p:cNvSpPr/>
           <p:nvPr/>
         </p:nvSpPr>
@@ -13568,7 +13568,7 @@
       </p:sp>
       <p:sp>
         <p:nvSpPr>
-          <p:cNvPr id="4" name="Oval 3"/>
+          <p:cNvPr id="4" name="deckgen:decor"/>
           <p:cNvSpPr/>
           <p:nvPr/>
         </p:nvSpPr>
@@ -13815,7 +13815,7 @@
       </p:sp>
       <p:sp>
         <p:nvSpPr>
-          <p:cNvPr id="11" name="TextBox 10"/>
+          <p:cNvPr id="11" name="deckgen:ornament"/>
           <p:cNvSpPr txBox="1"/>
           <p:nvPr/>
         </p:nvSpPr>
@@ -14175,7 +14175,7 @@
       <p:grpSpPr/>
       <p:sp>
         <p:nvSpPr>
-          <p:cNvPr id="2" name="Oval 1"/>
+          <p:cNvPr id="2" name="deckgen:decor"/>
           <p:cNvSpPr/>
           <p:nvPr/>
         </p:nvSpPr>
@@ -14205,7 +14205,7 @@
       </p:sp>
       <p:sp>
         <p:nvSpPr>
-          <p:cNvPr id="3" name="Oval 2"/>
+          <p:cNvPr id="3" name="deckgen:decor"/>
           <p:cNvSpPr/>
           <p:nvPr/>
         </p:nvSpPr>
@@ -14235,7 +14235,7 @@
       </p:sp>
       <p:sp>
         <p:nvSpPr>
-          <p:cNvPr id="4" name="Oval 3"/>
+          <p:cNvPr id="4" name="deckgen:decor"/>
           <p:cNvSpPr/>
           <p:nvPr/>
         </p:nvSpPr>
@@ -14441,7 +14441,7 @@
       </p:sp>
       <p:sp>
         <p:nvSpPr>
-          <p:cNvPr id="10" name="TextBox 9"/>
+          <p:cNvPr id="10" name="deckgen:ornament"/>
           <p:cNvSpPr txBox="1"/>
           <p:nvPr/>
         </p:nvSpPr>
@@ -14626,7 +14626,7 @@
       </p:sp>
       <p:sp>
         <p:nvSpPr>
-          <p:cNvPr id="14" name="TextBox 13"/>
+          <p:cNvPr id="14" name="deckgen:ornament"/>
           <p:cNvSpPr txBox="1"/>
           <p:nvPr/>
         </p:nvSpPr>
@@ -14877,7 +14877,7 @@
       <p:grpSpPr/>
       <p:sp>
         <p:nvSpPr>
-          <p:cNvPr id="2" name="Oval 1"/>
+          <p:cNvPr id="2" name="deckgen:decor"/>
           <p:cNvSpPr/>
           <p:nvPr/>
         </p:nvSpPr>
@@ -14907,7 +14907,7 @@
       </p:sp>
       <p:sp>
         <p:nvSpPr>
-          <p:cNvPr id="3" name="Oval 2"/>
+          <p:cNvPr id="3" name="deckgen:decor"/>
           <p:cNvSpPr/>
           <p:nvPr/>
         </p:nvSpPr>
@@ -14937,7 +14937,7 @@
       </p:sp>
       <p:sp>
         <p:nvSpPr>
-          <p:cNvPr id="4" name="Oval 3"/>
+          <p:cNvPr id="4" name="deckgen:decor"/>
           <p:cNvSpPr/>
           <p:nvPr/>
         </p:nvSpPr>
